--- a/assets/pptx/catalog-30.pptx
+++ b/assets/pptx/catalog-30.pptx
@@ -3459,7 +3459,7 @@
                 <a:ea typeface="Ebrima"/>
                 <a:cs typeface="Ebrima"/>
               </a:rPr>
-              <a:t>ለሰው ያሳየው ምህረቱ (6x)</a:t>
+              <a:t>ለሰው ያሳየው ምህረቱ 6x</a:t>
             </a:r>
           </a:p>
         </p:txBody>
@@ -3943,7 +3943,7 @@
                 <a:ea typeface="Ebrima"/>
                 <a:cs typeface="Ebrima"/>
               </a:rPr>
-              <a:t>ወደደንው/ሰገድን ያለ ጠመንጃ (2x)</a:t>
+              <a:t>ወደደንው/ሰገድን ያለ ጠመንጃ 2x</a:t>
             </a:r>
           </a:p>
         </p:txBody>
@@ -4149,7 +4149,7 @@
                 <a:ea typeface="Ebrima"/>
                 <a:cs typeface="Ebrima"/>
               </a:rPr>
-              <a:t>አስቲ ከእኔ ጋር ኢየሱስን እንዲህ በሉት (2x)</a:t>
+              <a:t>አስቲ ከእኔ ጋር ኢየሱስን እንዲህ በሉት 2x</a:t>
             </a:r>
           </a:p>
           <a:p>
@@ -4185,7 +4185,7 @@
                 <a:ea typeface="Ebrima"/>
                 <a:cs typeface="Ebrima"/>
               </a:rPr>
-              <a:t>እንዳንተ ያለ ኧረ ማን አለ (4x)</a:t>
+              <a:t>እንዳንተ ያለ ኧረ ማን አለ 4x</a:t>
             </a:r>
           </a:p>
         </p:txBody>
